--- a/images/figs.pptx
+++ b/images/figs.pptx
@@ -8,6 +8,7 @@
     <p:sldId id="256" r:id="rId2"/>
     <p:sldId id="257" r:id="rId3"/>
     <p:sldId id="258" r:id="rId4"/>
+    <p:sldId id="259" r:id="rId5"/>
   </p:sldIdLst>
   <p:sldSz cx="9144000" cy="6858000" type="screen4x3"/>
   <p:notesSz cx="6858000" cy="9144000"/>
@@ -3856,6 +3857,242 @@
 </p:sld>
 </file>
 
+<file path=ppt/slides/slide4.xml><?xml version="1.0" encoding="utf-8"?>
+<p:sld xmlns:a="http://schemas.openxmlformats.org/drawingml/2006/main" xmlns:r="http://schemas.openxmlformats.org/officeDocument/2006/relationships" xmlns:p="http://schemas.openxmlformats.org/presentationml/2006/main">
+  <p:cSld>
+    <p:spTree>
+      <p:nvGrpSpPr>
+        <p:cNvPr id="1" name=""/>
+        <p:cNvGrpSpPr/>
+        <p:nvPr/>
+      </p:nvGrpSpPr>
+      <p:grpSpPr>
+        <a:xfrm>
+          <a:off x="0" y="0"/>
+          <a:ext cx="0" cy="0"/>
+          <a:chOff x="0" y="0"/>
+          <a:chExt cx="0" cy="0"/>
+        </a:xfrm>
+      </p:grpSpPr>
+      <p:pic>
+        <p:nvPicPr>
+          <p:cNvPr id="5" name="コンテンツ プレースホルダー 4">
+            <a:extLst>
+              <a:ext uri="{FF2B5EF4-FFF2-40B4-BE49-F238E27FC236}">
+                <a16:creationId xmlns:a16="http://schemas.microsoft.com/office/drawing/2014/main" id="{E31CDE8A-0804-248A-5F25-C85214C7E0D6}"/>
+              </a:ext>
+            </a:extLst>
+          </p:cNvPr>
+          <p:cNvPicPr>
+            <a:picLocks noGrp="1" noChangeAspect="1"/>
+          </p:cNvPicPr>
+          <p:nvPr>
+            <p:ph idx="1"/>
+          </p:nvPr>
+        </p:nvPicPr>
+        <p:blipFill>
+          <a:blip r:embed="rId2"/>
+          <a:stretch>
+            <a:fillRect/>
+          </a:stretch>
+        </p:blipFill>
+        <p:spPr>
+          <a:xfrm>
+            <a:off x="269474" y="99627"/>
+            <a:ext cx="8654595" cy="6279530"/>
+          </a:xfrm>
+        </p:spPr>
+      </p:pic>
+      <p:sp>
+        <p:nvSpPr>
+          <p:cNvPr id="6" name="正方形/長方形 5">
+            <a:extLst>
+              <a:ext uri="{FF2B5EF4-FFF2-40B4-BE49-F238E27FC236}">
+                <a16:creationId xmlns:a16="http://schemas.microsoft.com/office/drawing/2014/main" id="{201A7FBC-7016-B917-684D-437F18109283}"/>
+              </a:ext>
+            </a:extLst>
+          </p:cNvPr>
+          <p:cNvSpPr/>
+          <p:nvPr/>
+        </p:nvSpPr>
+        <p:spPr>
+          <a:xfrm>
+            <a:off x="2877830" y="2364057"/>
+            <a:ext cx="5524911" cy="703782"/>
+          </a:xfrm>
+          <a:prstGeom prst="rect">
+            <a:avLst/>
+          </a:prstGeom>
+          <a:noFill/>
+          <a:ln w="57150">
+            <a:solidFill>
+              <a:srgbClr val="FF0000"/>
+            </a:solidFill>
+          </a:ln>
+        </p:spPr>
+        <p:style>
+          <a:lnRef idx="2">
+            <a:schemeClr val="accent1">
+              <a:shade val="50000"/>
+            </a:schemeClr>
+          </a:lnRef>
+          <a:fillRef idx="1">
+            <a:schemeClr val="accent1"/>
+          </a:fillRef>
+          <a:effectRef idx="0">
+            <a:schemeClr val="accent1"/>
+          </a:effectRef>
+          <a:fontRef idx="minor">
+            <a:schemeClr val="lt1"/>
+          </a:fontRef>
+        </p:style>
+        <p:txBody>
+          <a:bodyPr rtlCol="0" anchor="ctr"/>
+          <a:lstStyle/>
+          <a:p>
+            <a:pPr algn="ctr"/>
+            <a:endParaRPr kumimoji="1" lang="ja-JP" altLang="en-US"/>
+          </a:p>
+        </p:txBody>
+      </p:sp>
+      <p:sp>
+        <p:nvSpPr>
+          <p:cNvPr id="7" name="吹き出し: 四角形 6">
+            <a:extLst>
+              <a:ext uri="{FF2B5EF4-FFF2-40B4-BE49-F238E27FC236}">
+                <a16:creationId xmlns:a16="http://schemas.microsoft.com/office/drawing/2014/main" id="{47F0B47A-15F7-5141-0C6C-F9FC9E68E39C}"/>
+              </a:ext>
+            </a:extLst>
+          </p:cNvPr>
+          <p:cNvSpPr/>
+          <p:nvPr/>
+        </p:nvSpPr>
+        <p:spPr>
+          <a:xfrm>
+            <a:off x="4474608" y="3307501"/>
+            <a:ext cx="4148416" cy="615221"/>
+          </a:xfrm>
+          <a:prstGeom prst="wedgeRectCallout">
+            <a:avLst>
+              <a:gd name="adj1" fmla="val -20377"/>
+              <a:gd name="adj2" fmla="val -93216"/>
+            </a:avLst>
+          </a:prstGeom>
+          <a:solidFill>
+            <a:srgbClr val="FFFFCC"/>
+          </a:solidFill>
+          <a:ln>
+            <a:solidFill>
+              <a:srgbClr val="FF0000"/>
+            </a:solidFill>
+          </a:ln>
+        </p:spPr>
+        <p:style>
+          <a:lnRef idx="2">
+            <a:schemeClr val="accent1">
+              <a:shade val="50000"/>
+            </a:schemeClr>
+          </a:lnRef>
+          <a:fillRef idx="1">
+            <a:schemeClr val="accent1"/>
+          </a:fillRef>
+          <a:effectRef idx="0">
+            <a:schemeClr val="accent1"/>
+          </a:effectRef>
+          <a:fontRef idx="minor">
+            <a:schemeClr val="lt1"/>
+          </a:fontRef>
+        </p:style>
+        <p:txBody>
+          <a:bodyPr rtlCol="0" anchor="ctr"/>
+          <a:lstStyle/>
+          <a:p>
+            <a:pPr algn="ctr"/>
+            <a:r>
+              <a:rPr kumimoji="1" lang="ja-JP" altLang="en-US" b="1" dirty="0">
+                <a:solidFill>
+                  <a:srgbClr val="FF0000"/>
+                </a:solidFill>
+              </a:rPr>
+              <a:t>「アクセス」</a:t>
+            </a:r>
+            <a:r>
+              <a:rPr kumimoji="1" lang="ja-JP" altLang="en-US" dirty="0">
+                <a:solidFill>
+                  <a:srgbClr val="FF0000"/>
+                </a:solidFill>
+              </a:rPr>
+              <a:t>を</a:t>
+            </a:r>
+            <a:r>
+              <a:rPr kumimoji="1" lang="en-US" altLang="ja-JP" dirty="0">
+                <a:solidFill>
+                  <a:srgbClr val="FF0000"/>
+                </a:solidFill>
+              </a:rPr>
+              <a:t>OFF</a:t>
+            </a:r>
+            <a:r>
+              <a:rPr kumimoji="1" lang="ja-JP" altLang="en-US" dirty="0">
+                <a:solidFill>
+                  <a:srgbClr val="FF0000"/>
+                </a:solidFill>
+              </a:rPr>
+              <a:t>にする</a:t>
+            </a:r>
+            <a:endParaRPr kumimoji="1" lang="en-US" altLang="ja-JP" dirty="0">
+              <a:solidFill>
+                <a:srgbClr val="FF0000"/>
+              </a:solidFill>
+            </a:endParaRPr>
+          </a:p>
+          <a:p>
+            <a:pPr algn="ctr"/>
+            <a:r>
+              <a:rPr kumimoji="1" lang="ja-JP" altLang="en-US" dirty="0">
+                <a:solidFill>
+                  <a:srgbClr val="FF0000"/>
+                </a:solidFill>
+              </a:rPr>
+              <a:t>（インストール時は</a:t>
+            </a:r>
+            <a:r>
+              <a:rPr kumimoji="1" lang="en-US" altLang="ja-JP" dirty="0">
+                <a:solidFill>
+                  <a:srgbClr val="FF0000"/>
+                </a:solidFill>
+              </a:rPr>
+              <a:t>ON</a:t>
+            </a:r>
+            <a:r>
+              <a:rPr kumimoji="1" lang="ja-JP" altLang="en-US" dirty="0">
+                <a:solidFill>
+                  <a:srgbClr val="FF0000"/>
+                </a:solidFill>
+              </a:rPr>
+              <a:t>になっている）</a:t>
+            </a:r>
+            <a:endParaRPr kumimoji="1" lang="en-US" altLang="ja-JP" dirty="0">
+              <a:solidFill>
+                <a:srgbClr val="FF0000"/>
+              </a:solidFill>
+            </a:endParaRPr>
+          </a:p>
+        </p:txBody>
+      </p:sp>
+    </p:spTree>
+    <p:extLst>
+      <p:ext uri="{BB962C8B-B14F-4D97-AF65-F5344CB8AC3E}">
+        <p14:creationId xmlns:p14="http://schemas.microsoft.com/office/powerpoint/2010/main" val="292478834"/>
+      </p:ext>
+    </p:extLst>
+  </p:cSld>
+  <p:clrMapOvr>
+    <a:masterClrMapping/>
+  </p:clrMapOvr>
+</p:sld>
+</file>
+
 <file path=ppt/theme/theme1.xml><?xml version="1.0" encoding="utf-8"?>
 <a:theme xmlns:a="http://schemas.openxmlformats.org/drawingml/2006/main" name="Office テーマ">
   <a:themeElements>
